--- a/dist/초4/과학/생물과기체/초4_과학_생물과기체_02_기체의성질_학생용.pptx
+++ b/dist/초4/과학/생물과기체/초4_과학_생물과기체_02_기체의성질_학생용.pptx
@@ -123,13 +123,13 @@
   <p:extLst>
     <p:ext uri="{521415D9-36F7-43E2-AB2F-B90AF26B5E84}">
       <p14:sectionLst xmlns:p14="http://schemas.microsoft.com/office/powerpoint/2010/main">
-        <p14:section name="도입" id="{9fe7999f-0fc6-b1b4-7d73-1e53a821a6e2}">
+        <p14:section name="도입" id="{9521dbf3-72a2-7cff-a741-b86eec331d6d}">
           <p14:sldIdLst>
             <p14:sldId id="256"/>
             <p14:sldId id="257"/>
           </p14:sldIdLst>
         </p14:section>
-        <p14:section name="연습" id="{e248b7d6-322f-de4e-5912-df5999e0e183}">
+        <p14:section name="연습" id="{93b0bddc-4f57-db22-3fcc-0cf78a389de1}">
           <p14:sldIdLst>
             <p14:sldId id="258"/>
             <p14:sldId id="259"/>
@@ -142,33 +142,33 @@
             <p14:sldId id="268"/>
           </p14:sldIdLst>
         </p14:section>
-        <p14:section name="개념" id="{e4773b6b-0878-a99a-4583-fe65605171a8}">
+        <p14:section name="개념" id="{15dfa51c-cb5b-ccfa-ab0c-a0a88ca3cfe3}">
           <p14:sldIdLst>
             <p14:sldId id="261"/>
             <p14:sldId id="267"/>
           </p14:sldIdLst>
         </p14:section>
-        <p14:section name="연습" id="{06a328de-f8a0-f71d-148d-3a675e5e1f25}">
+        <p14:section name="연습" id="{f7c0eac1-c41a-f2f9-a9c2-2a1052979bfa}">
           <p14:sldIdLst/>
         </p14:section>
-        <p14:section name="개념" id="{a9beb74d-32c3-2ef3-3e8c-254d5fe8e7da}">
+        <p14:section name="개념" id="{cf52d801-2fd8-9c71-3936-4f1862507d48}">
           <p14:sldIdLst/>
         </p14:section>
-        <p14:section name="연습" id="{80817eb5-a87a-5b54-f33f-5e928641a22e}">
+        <p14:section name="연습" id="{5c8da0a6-cb58-704e-370f-0d338f8f94f0}">
           <p14:sldIdLst/>
         </p14:section>
-        <p14:section name="확인" id="{721149e2-1d14-f706-994b-daf1f1e9ddab}">
+        <p14:section name="확인" id="{ee01f48d-741a-468c-30e0-06dd233f97e6}">
           <p14:sldIdLst>
             <p14:sldId id="269"/>
             <p14:sldId id="270"/>
           </p14:sldIdLst>
         </p14:section>
-        <p14:section name="정리" id="{5558d0ab-04d0-b15f-3958-2c5616a036ea}">
+        <p14:section name="정리" id="{dd79d590-e7b5-77ec-3894-ed096bafadac}">
           <p14:sldIdLst>
             <p14:sldId id="271"/>
           </p14:sldIdLst>
         </p14:section>
-        <p14:section name="보충" id="{ce89639e-7cd4-9866-3960-8b28f4deb5b8}">
+        <p14:section name="보충" id="{4e09749d-91c4-af02-0b95-41f5cb28154c}">
           <p14:sldIdLst>
             <p14:sldId id="272"/>
           </p14:sldIdLst>
